--- a/labs/lab07/slides/slides.pptx
+++ b/labs/lab07/slides/slides.pptx
@@ -5,7 +5,7 @@
     <p:sldMasterId id="2147483696" r:id="rId1"/>
   </p:sldMasterIdLst>
   <p:notesMasterIdLst>
-    <p:notesMasterId r:id="rId18"/>
+    <p:notesMasterId r:id="rId16"/>
   </p:notesMasterIdLst>
   <p:sldIdLst>
     <p:sldId id="256" r:id="rId2"/>
@@ -22,8 +22,6 @@
     <p:sldId id="267" r:id="rId13"/>
     <p:sldId id="268" r:id="rId14"/>
     <p:sldId id="269" r:id="rId15"/>
-    <p:sldId id="270" r:id="rId16"/>
-    <p:sldId id="271" r:id="rId17"/>
   </p:sldIdLst>
   <p:sldSz cx="12192000" cy="6858000"/>
   <p:notesSz cx="6858000" cy="9144000"/>
@@ -527,8 +525,10 @@
               <a:buNone/>
             </a:pPr>
             <a:r>
-              <a:rPr/>
-              <a:t>Begin with the Superman file for RH1 and RH2. The Hot Ones file is used only after both walkthroughs are complete.</a:t>
+              <a:rPr>
+                <a:hlinkClick r:id="rId3"/>
+              </a:rPr>
+              <a:t>Use the Superman dataset for both walkthroughs. Keep the simple SPSS guides available for the analysis and reporting steps.</a:t>
             </a:r>
           </a:p>
         </p:txBody>
@@ -610,7 +610,7 @@
             </a:pPr>
             <a:r>
               <a:rPr/>
-              <a:t>Compare observed and expected counts before reading chi-square, df, and p. The result describes association, not causation.</a:t>
+              <a:t>Keep the Superman dataset open. Find the cross-tabulation first, then the Pearson Chi-Square row in the test output. Students need the observed pattern as well as the test statistic, degrees of freedom, and p value.</a:t>
             </a:r>
           </a:p>
         </p:txBody>
@@ -632,7 +632,7 @@
           <a:p>
             <a:fld id="{18BDFEC3-8487-43E8-A154-7C12CBC1FFF2}" type="slidenum">
               <a:rPr lang="en-US"/>
-              <a:t>11</a:t>
+              <a:t>12</a:t>
             </a:fld>
             <a:endParaRPr lang="en-US"/>
           </a:p>
@@ -692,7 +692,7 @@
             </a:pPr>
             <a:r>
               <a:rPr/>
-              <a:t>RH3 and RH4 are correlations. RH5 and RH6 are chi-square tests. Each research hypothesis has its own transformation and selection instructions.</a:t>
+              <a:t>Separate the predicted comparisons from the observed counts. Review any expected-count warning in SPSS before interpreting p. This worksheet practices the Pearson chi-square analysis; the small counts limit how confidently this example can be interpreted.</a:t>
             </a:r>
           </a:p>
         </p:txBody>
@@ -714,7 +714,7 @@
           <a:p>
             <a:fld id="{18BDFEC3-8487-43E8-A154-7C12CBC1FFF2}" type="slidenum">
               <a:rPr lang="en-US"/>
-              <a:t>12</a:t>
+              <a:t>13</a:t>
             </a:fld>
             <a:endParaRPr lang="en-US"/>
           </a:p>
@@ -774,7 +774,7 @@
             </a:pPr>
             <a:r>
               <a:rPr/>
-              <a:t>RH3 computes total_SHU_mil. RH4 computes engagement. RH5 recodes occupation and likes. RH6 creates age_grp. All four use completed episodes only.</a:t>
+              <a:t>Check the row and column labels before transferring counts. The written result should explain how the observed pattern relates to both parts of RH2. A p value alone does not answer that question.</a:t>
             </a:r>
           </a:p>
         </p:txBody>
@@ -796,253 +796,7 @@
           <a:p>
             <a:fld id="{18BDFEC3-8487-43E8-A154-7C12CBC1FFF2}" type="slidenum">
               <a:rPr lang="en-US"/>
-              <a:t>13</a:t>
-            </a:fld>
-            <a:endParaRPr lang="en-US"/>
-          </a:p>
-        </p:txBody>
-      </p:sp>
-    </p:spTree>
-  </p:cSld>
-</p:notes>
-</file>
-
-<file path=ppt/notesSlides/notesSlide13.xml><?xml version="1.0" encoding="utf-8"?>
-<p:notes xmlns:a="http://schemas.openxmlformats.org/drawingml/2006/main" xmlns:r="http://schemas.openxmlformats.org/officeDocument/2006/relationships" xmlns:p="http://schemas.openxmlformats.org/presentationml/2006/main">
-  <p:cSld>
-    <p:spTree>
-      <p:nvGrpSpPr>
-        <p:cNvPr id="1" name=""/>
-        <p:cNvGrpSpPr/>
-        <p:nvPr/>
-      </p:nvGrpSpPr>
-      <p:grpSpPr>
-        <a:xfrm>
-          <a:off x="0" y="0"/>
-          <a:ext cx="0" cy="0"/>
-          <a:chOff x="0" y="0"/>
-          <a:chExt cx="0" cy="0"/>
-        </a:xfrm>
-      </p:grpSpPr>
-      <p:sp>
-        <p:nvSpPr>
-          <p:cNvPr id="2" name="Slide Image Placeholder 1"/>
-          <p:cNvSpPr>
-            <a:spLocks noGrp="1" noRot="1" noChangeAspect="1"/>
-          </p:cNvSpPr>
-          <p:nvPr>
-            <p:ph type="sldImg"/>
-          </p:nvPr>
-        </p:nvSpPr>
-        <p:spPr/>
-      </p:sp>
-      <p:sp>
-        <p:nvSpPr>
-          <p:cNvPr id="3" name="Notes Placeholder 2"/>
-          <p:cNvSpPr>
-            <a:spLocks noGrp="1"/>
-          </p:cNvSpPr>
-          <p:nvPr>
-            <p:ph type="body" idx="1"/>
-          </p:nvPr>
-        </p:nvSpPr>
-        <p:spPr/>
-        <p:txBody>
-          <a:bodyPr/>
-          <a:lstStyle/>
-          <a:p>
-            <a:pPr lvl="0" indent="0" marL="0">
-              <a:buNone/>
-            </a:pPr>
-            <a:r>
-              <a:rPr/>
-              <a:t>This output is generated with create_apa_corr_table(), following the SPSS handout. Use the same layout for walkthrough Table 1 and combine RH3 and RH4 in the worksheet’s Table 3.</a:t>
-            </a:r>
-          </a:p>
-        </p:txBody>
-      </p:sp>
-      <p:sp>
-        <p:nvSpPr>
-          <p:cNvPr id="4" name="Slide Number Placeholder 3"/>
-          <p:cNvSpPr>
-            <a:spLocks noGrp="1"/>
-          </p:cNvSpPr>
-          <p:nvPr>
-            <p:ph type="sldNum" sz="quarter" idx="10"/>
-          </p:nvPr>
-        </p:nvSpPr>
-        <p:spPr/>
-        <p:txBody>
-          <a:bodyPr/>
-          <a:lstStyle/>
-          <a:p>
-            <a:fld id="{18BDFEC3-8487-43E8-A154-7C12CBC1FFF2}" type="slidenum">
-              <a:rPr lang="en-US"/>
               <a:t>14</a:t>
-            </a:fld>
-            <a:endParaRPr lang="en-US"/>
-          </a:p>
-        </p:txBody>
-      </p:sp>
-    </p:spTree>
-  </p:cSld>
-</p:notes>
-</file>
-
-<file path=ppt/notesSlides/notesSlide14.xml><?xml version="1.0" encoding="utf-8"?>
-<p:notes xmlns:a="http://schemas.openxmlformats.org/drawingml/2006/main" xmlns:r="http://schemas.openxmlformats.org/officeDocument/2006/relationships" xmlns:p="http://schemas.openxmlformats.org/presentationml/2006/main">
-  <p:cSld>
-    <p:spTree>
-      <p:nvGrpSpPr>
-        <p:cNvPr id="1" name=""/>
-        <p:cNvGrpSpPr/>
-        <p:nvPr/>
-      </p:nvGrpSpPr>
-      <p:grpSpPr>
-        <a:xfrm>
-          <a:off x="0" y="0"/>
-          <a:ext cx="0" cy="0"/>
-          <a:chOff x="0" y="0"/>
-          <a:chExt cx="0" cy="0"/>
-        </a:xfrm>
-      </p:grpSpPr>
-      <p:sp>
-        <p:nvSpPr>
-          <p:cNvPr id="2" name="Slide Image Placeholder 1"/>
-          <p:cNvSpPr>
-            <a:spLocks noGrp="1" noRot="1" noChangeAspect="1"/>
-          </p:cNvSpPr>
-          <p:nvPr>
-            <p:ph type="sldImg"/>
-          </p:nvPr>
-        </p:nvSpPr>
-        <p:spPr/>
-      </p:sp>
-      <p:sp>
-        <p:nvSpPr>
-          <p:cNvPr id="3" name="Notes Placeholder 2"/>
-          <p:cNvSpPr>
-            <a:spLocks noGrp="1"/>
-          </p:cNvSpPr>
-          <p:nvPr>
-            <p:ph type="body" idx="1"/>
-          </p:nvPr>
-        </p:nvSpPr>
-        <p:spPr/>
-        <p:txBody>
-          <a:bodyPr/>
-          <a:lstStyle/>
-          <a:p>
-            <a:pPr lvl="0" indent="0" marL="0">
-              <a:buNone/>
-            </a:pPr>
-            <a:r>
-              <a:rPr/>
-              <a:t>This output is generated with create_apa_chi_crosstabs_table(), following the chi-square handout. The written result should refer directly to the numbered table.</a:t>
-            </a:r>
-          </a:p>
-        </p:txBody>
-      </p:sp>
-      <p:sp>
-        <p:nvSpPr>
-          <p:cNvPr id="4" name="Slide Number Placeholder 3"/>
-          <p:cNvSpPr>
-            <a:spLocks noGrp="1"/>
-          </p:cNvSpPr>
-          <p:nvPr>
-            <p:ph type="sldNum" sz="quarter" idx="10"/>
-          </p:nvPr>
-        </p:nvSpPr>
-        <p:spPr/>
-        <p:txBody>
-          <a:bodyPr/>
-          <a:lstStyle/>
-          <a:p>
-            <a:fld id="{18BDFEC3-8487-43E8-A154-7C12CBC1FFF2}" type="slidenum">
-              <a:rPr lang="en-US"/>
-              <a:t>15</a:t>
-            </a:fld>
-            <a:endParaRPr lang="en-US"/>
-          </a:p>
-        </p:txBody>
-      </p:sp>
-    </p:spTree>
-  </p:cSld>
-</p:notes>
-</file>
-
-<file path=ppt/notesSlides/notesSlide15.xml><?xml version="1.0" encoding="utf-8"?>
-<p:notes xmlns:a="http://schemas.openxmlformats.org/drawingml/2006/main" xmlns:r="http://schemas.openxmlformats.org/officeDocument/2006/relationships" xmlns:p="http://schemas.openxmlformats.org/presentationml/2006/main">
-  <p:cSld>
-    <p:spTree>
-      <p:nvGrpSpPr>
-        <p:cNvPr id="1" name=""/>
-        <p:cNvGrpSpPr/>
-        <p:nvPr/>
-      </p:nvGrpSpPr>
-      <p:grpSpPr>
-        <a:xfrm>
-          <a:off x="0" y="0"/>
-          <a:ext cx="0" cy="0"/>
-          <a:chOff x="0" y="0"/>
-          <a:chExt cx="0" cy="0"/>
-        </a:xfrm>
-      </p:grpSpPr>
-      <p:sp>
-        <p:nvSpPr>
-          <p:cNvPr id="2" name="Slide Image Placeholder 1"/>
-          <p:cNvSpPr>
-            <a:spLocks noGrp="1" noRot="1" noChangeAspect="1"/>
-          </p:cNvSpPr>
-          <p:nvPr>
-            <p:ph type="sldImg"/>
-          </p:nvPr>
-        </p:nvSpPr>
-        <p:spPr/>
-      </p:sp>
-      <p:sp>
-        <p:nvSpPr>
-          <p:cNvPr id="3" name="Notes Placeholder 2"/>
-          <p:cNvSpPr>
-            <a:spLocks noGrp="1"/>
-          </p:cNvSpPr>
-          <p:nvPr>
-            <p:ph type="body" idx="1"/>
-          </p:nvPr>
-        </p:nvSpPr>
-        <p:spPr/>
-        <p:txBody>
-          <a:bodyPr/>
-          <a:lstStyle/>
-          <a:p>
-            <a:pPr lvl="0" indent="0" marL="0">
-              <a:buNone/>
-            </a:pPr>
-            <a:r>
-              <a:rPr/>
-              <a:t>The last slides focus only on reporting. Students should not write “significant correlation” or “significant chi-square” without explaining the direction or pattern in plain language.</a:t>
-            </a:r>
-          </a:p>
-        </p:txBody>
-      </p:sp>
-      <p:sp>
-        <p:nvSpPr>
-          <p:cNvPr id="4" name="Slide Number Placeholder 3"/>
-          <p:cNvSpPr>
-            <a:spLocks noGrp="1"/>
-          </p:cNvSpPr>
-          <p:nvPr>
-            <p:ph type="sldNum" sz="quarter" idx="10"/>
-          </p:nvPr>
-        </p:nvSpPr>
-        <p:spPr/>
-        <p:txBody>
-          <a:bodyPr/>
-          <a:lstStyle/>
-          <a:p>
-            <a:fld id="{18BDFEC3-8487-43E8-A154-7C12CBC1FFF2}" type="slidenum">
-              <a:rPr lang="en-US"/>
-              <a:t>16</a:t>
             </a:fld>
             <a:endParaRPr lang="en-US"/>
           </a:p>
@@ -1102,7 +856,7 @@
             </a:pPr>
             <a:r>
               <a:rPr/>
-              <a:t>Keep the dataset and saved syntax open together. Inspect variables and cases in the Data Editor; reproduce every command in the Syntax Editor.</a:t>
+              <a:t>This is a brief reminder from Lab 06. Have students inspect Variable View before computing new variables. A missing-value code must not enter a calculation as an observed value.</a:t>
             </a:r>
           </a:p>
         </p:txBody>
@@ -1184,7 +938,7 @@
             </a:pPr>
             <a:r>
               <a:rPr/>
-              <a:t>The Output Viewer accumulates tables, charts, warnings, and processing notes. Keep it open beside the data and syntax windows, and export only the results needed for the worksheet or report.</a:t>
+              <a:t>Ask students to identify each variable’s type and describe the predicted relationship. The numbers used to code a category do not make it quantitative.</a:t>
             </a:r>
           </a:p>
         </p:txBody>
@@ -1206,7 +960,7 @@
           <a:p>
             <a:fld id="{18BDFEC3-8487-43E8-A154-7C12CBC1FFF2}" type="slidenum">
               <a:rPr lang="en-US"/>
-              <a:t>4</a:t>
+              <a:t>5</a:t>
             </a:fld>
             <a:endParaRPr lang="en-US"/>
           </a:p>
@@ -1266,7 +1020,7 @@
             </a:pPr>
             <a:r>
               <a:rPr/>
-              <a:t>Identify variable type and the predicted pattern before opening an analysis dialog. Numeric codes can still represent categories.</a:t>
+              <a:t>Have students state the prediction before looking at their results. The plot must use height_diff and ldb_likes_thou, the variables named in RH1. Check for outliers as well as form and direction.</a:t>
             </a:r>
           </a:p>
         </p:txBody>
@@ -1288,7 +1042,7 @@
           <a:p>
             <a:fld id="{18BDFEC3-8487-43E8-A154-7C12CBC1FFF2}" type="slidenum">
               <a:rPr lang="en-US"/>
-              <a:t>5</a:t>
+              <a:t>6</a:t>
             </a:fld>
             <a:endParaRPr lang="en-US"/>
           </a:p>
@@ -1348,7 +1102,7 @@
             </a:pPr>
             <a:r>
               <a:rPr/>
-              <a:t>A statistical test cannot rescue a badly chosen summary. For correlation, first check approximate linearity. For chi-square, first describe the cell pattern.</a:t>
+              <a:t>RH1 uses no subset. Compute likes in thousands and put height_diff on the Y axis, as the worksheet directs. The plot includes cases with values for both variables. Students answer the scatterplot questions before running the correlation.</a:t>
             </a:r>
           </a:p>
         </p:txBody>
@@ -1370,7 +1124,7 @@
           <a:p>
             <a:fld id="{18BDFEC3-8487-43E8-A154-7C12CBC1FFF2}" type="slidenum">
               <a:rPr lang="en-US"/>
-              <a:t>6</a:t>
+              <a:t>7</a:t>
             </a:fld>
             <a:endParaRPr lang="en-US"/>
           </a:p>
@@ -1430,7 +1184,7 @@
             </a:pPr>
             <a:r>
               <a:rPr/>
-              <a:t>The worksheet specifies no subset for RH1. Compute likes in thousands, then place height_diff on the Y axis and inspect the plot before testing the correlation.</a:t>
+              <a:t>Use the worksheet’s pairwise setting. Each variable’s descriptive statistics can use a different number of cases; the correlation uses cases with both values. Check those sample sizes separately.</a:t>
             </a:r>
           </a:p>
         </p:txBody>
@@ -1452,7 +1206,7 @@
           <a:p>
             <a:fld id="{18BDFEC3-8487-43E8-A154-7C12CBC1FFF2}" type="slidenum">
               <a:rPr lang="en-US"/>
-              <a:t>7</a:t>
+              <a:t>8</a:t>
             </a:fld>
             <a:endParaRPr lang="en-US"/>
           </a:p>
@@ -1512,7 +1266,7 @@
             </a:pPr>
             <a:r>
               <a:rPr/>
-              <a:t>Run the correlation from saved syntax after inspecting the scatterplot and active cases.</a:t>
+              <a:t>Have students identify the relevant row and column in their own output. Calculate the correlation’s degrees of freedom as the number of complete pairs minus two. Describe the association without making a causal claim.</a:t>
             </a:r>
           </a:p>
         </p:txBody>
@@ -1534,7 +1288,7 @@
           <a:p>
             <a:fld id="{18BDFEC3-8487-43E8-A154-7C12CBC1FFF2}" type="slidenum">
               <a:rPr lang="en-US"/>
-              <a:t>8</a:t>
+              <a:t>9</a:t>
             </a:fld>
             <a:endParaRPr lang="en-US"/>
           </a:p>
@@ -1594,7 +1348,7 @@
             </a:pPr>
             <a:r>
               <a:rPr/>
-              <a:t>Read r, p, and N from the output, then compute df as N minus 2. Use association language rather than causal language.</a:t>
+              <a:t>Use the worksheet’s blank table and the correlation guide for formatting. Ask whether the result supports the predicted direction. Students should finish the RH1 reporting steps before starting RH2.</a:t>
             </a:r>
           </a:p>
         </p:txBody>
@@ -1616,7 +1370,7 @@
           <a:p>
             <a:fld id="{18BDFEC3-8487-43E8-A154-7C12CBC1FFF2}" type="slidenum">
               <a:rPr lang="en-US"/>
-              <a:t>9</a:t>
+              <a:t>10</a:t>
             </a:fld>
             <a:endParaRPr lang="en-US"/>
           </a:p>
@@ -1676,7 +1430,7 @@
             </a:pPr>
             <a:r>
               <a:rPr/>
-              <a:t>Run the crosstab from saved syntax and request observed counts, expected counts, and percentages.</a:t>
+              <a:t>Students should compare the two rating categories within each height group. Have them explain their operators in words before they inspect observed counts. Use the category labels in the supplied data and worksheet grid.</a:t>
             </a:r>
           </a:p>
         </p:txBody>
@@ -1698,7 +1452,7 @@
           <a:p>
             <a:fld id="{18BDFEC3-8487-43E8-A154-7C12CBC1FFF2}" type="slidenum">
               <a:rPr lang="en-US"/>
-              <a:t>10</a:t>
+              <a:t>11</a:t>
             </a:fld>
             <a:endParaRPr lang="en-US"/>
           </a:p>
@@ -2967,8 +2721,8 @@
         </p:nvSpPr>
         <p:spPr>
           <a:xfrm>
-            <a:off x="1583436" y="2313433"/>
-            <a:ext cx="4270248" cy="704087"/>
+            <a:off x="1097280" y="2313433"/>
+            <a:ext cx="4907280" cy="548640"/>
           </a:xfrm>
         </p:spPr>
         <p:txBody>
@@ -3040,8 +2794,8 @@
         </p:nvSpPr>
         <p:spPr>
           <a:xfrm>
-            <a:off x="1583436" y="3143250"/>
-            <a:ext cx="4270248" cy="2596776"/>
+            <a:off x="1097280" y="2926080"/>
+            <a:ext cx="4907280" cy="3177540"/>
           </a:xfrm>
         </p:spPr>
         <p:txBody>
@@ -3097,8 +2851,8 @@
         </p:nvSpPr>
         <p:spPr>
           <a:xfrm>
-            <a:off x="6338316" y="3143250"/>
-            <a:ext cx="4253484" cy="2596776"/>
+            <a:off x="6187440" y="2926080"/>
+            <a:ext cx="4907280" cy="3177540"/>
           </a:xfrm>
         </p:spPr>
         <p:txBody>
@@ -3158,8 +2912,8 @@
         </p:nvSpPr>
         <p:spPr>
           <a:xfrm>
-            <a:off x="6338316" y="2313433"/>
-            <a:ext cx="4270248" cy="704087"/>
+            <a:off x="6187440" y="2313433"/>
+            <a:ext cx="4907280" cy="548640"/>
           </a:xfrm>
         </p:spPr>
         <p:txBody>
@@ -3294,7 +3048,12 @@
             <p:ph type="title"/>
           </p:nvPr>
         </p:nvSpPr>
-        <p:spPr/>
+        <p:spPr>
+          <a:xfrm>
+            <a:off x="1097280" y="964692"/>
+            <a:ext cx="9997440" cy="1188720"/>
+          </a:xfrm>
+        </p:spPr>
         <p:txBody>
           <a:bodyPr/>
           <a:lstStyle/>
@@ -4889,9 +4648,7 @@
               <a:buNone/>
             </a:pPr>
             <a:r>
-              <a:rPr>
-                <a:hlinkClick r:id="rId2"/>
-              </a:rPr>
+              <a:rPr/>
               <a:t>Correlation and Chi-Square</a:t>
             </a:r>
           </a:p>
@@ -4981,7 +4738,7 @@
             </a:pPr>
             <a:r>
               <a:rPr/>
-              <a:t>9 Run the RH2 chi-square</a:t>
+              <a:t>8 Report RH1 in Table 1</a:t>
             </a:r>
           </a:p>
         </p:txBody>
@@ -5001,19 +4758,41 @@
           <a:bodyPr/>
           <a:lstStyle/>
           <a:p>
-            <a:pPr lvl="0" indent="0">
+            <a:pPr lvl="0" indent="0" marL="0">
               <a:buNone/>
             </a:pPr>
             <a:r>
-              <a:rPr>
-                <a:latin typeface="Courier"/>
-              </a:rPr>
-              <a:t>CROSSTABS
-  /TABLES=
-    clark_grp BY tomatometer
-  /STATISTICS=CHISQ
-  /CELLS=COUNT EXPECTED
-    ROW COLUMN.</a:t>
+              <a:rPr/>
+              <a:t>[Finish RH1]</a:t>
+            </a:r>
+          </a:p>
+          <a:p>
+            <a:pPr lvl="0"/>
+            <a:r>
+              <a:rPr/>
+              <a:t>Fill the worksheet’s </a:t>
+            </a:r>
+            <a:r>
+              <a:rPr b="1"/>
+              <a:t>Table 1</a:t>
+            </a:r>
+            <a:r>
+              <a:rPr/>
+              <a:t> with the descriptives and correlation</a:t>
+            </a:r>
+          </a:p>
+          <a:p>
+            <a:pPr lvl="0"/>
+            <a:r>
+              <a:rPr/>
+              <a:t>Write the result, including the univariate statistics</a:t>
+            </a:r>
+          </a:p>
+          <a:p>
+            <a:pPr lvl="0"/>
+            <a:r>
+              <a:rPr/>
+              <a:t>Add the required screenshot of correct checker answers</a:t>
             </a:r>
           </a:p>
         </p:txBody>
@@ -5065,41 +4844,102 @@
             </a:pPr>
             <a:r>
               <a:rPr/>
-              <a:t>10 Describe the RH2 counts first</a:t>
-            </a:r>
-          </a:p>
-        </p:txBody>
-      </p:sp>
-      <p:pic>
-        <p:nvPicPr>
-          <p:cNvPr descr="SPSS-style crosstabulation of Clark actor height group by Rotten versus Fresh rating, showing counts and expected counts for 8 complete cases" id="0" name="Picture 1"/>
-          <p:cNvPicPr>
-            <a:picLocks noGrp="1" noChangeAspect="1"/>
-          </p:cNvPicPr>
-          <p:nvPr/>
-        </p:nvPicPr>
-        <p:blipFill>
-          <a:blip r:embed="rId3"/>
-          <a:stretch>
-            <a:fillRect/>
-          </a:stretch>
-        </p:blipFill>
-        <p:spPr bwMode="auto">
-          <a:xfrm>
-            <a:off x="2933700" y="2628900"/>
-            <a:ext cx="6324600" cy="3098800"/>
-          </a:xfrm>
-          <a:prstGeom prst="rect">
-            <a:avLst/>
-          </a:prstGeom>
-          <a:noFill/>
-          <a:ln w="9525">
-            <a:noFill/>
-            <a:headEnd/>
-            <a:tailEnd/>
-          </a:ln>
-        </p:spPr>
-      </p:pic>
+              <a:t>9 Predict the RH2 cell pattern</a:t>
+            </a:r>
+          </a:p>
+        </p:txBody>
+      </p:sp>
+      <p:sp>
+        <p:nvSpPr>
+          <p:cNvPr id="3" name="Content Placeholder 2"/>
+          <p:cNvSpPr>
+            <a:spLocks noGrp="1"/>
+          </p:cNvSpPr>
+          <p:nvPr>
+            <p:ph idx="1"/>
+          </p:nvPr>
+        </p:nvSpPr>
+        <p:spPr/>
+        <p:txBody>
+          <a:bodyPr/>
+          <a:lstStyle/>
+          <a:p>
+            <a:pPr lvl="0" indent="0" marL="0">
+              <a:buNone/>
+            </a:pPr>
+            <a:r>
+              <a:rPr/>
+              <a:t>[RH2 · Before the analysis]</a:t>
+            </a:r>
+          </a:p>
+          <a:p>
+            <a:pPr lvl="0" indent="0" marL="0">
+              <a:buNone/>
+            </a:pPr>
+            <a:r>
+              <a:rPr b="1"/>
+              <a:t>Actor height group</a:t>
+            </a:r>
+            <a:r>
+              <a:rPr/>
+              <a:t> and </a:t>
+            </a:r>
+            <a:r>
+              <a:rPr b="1"/>
+              <a:t>Fresh/Rotten rating</a:t>
+            </a:r>
+          </a:p>
+          <a:p>
+            <a:pPr lvl="0"/>
+            <a:r>
+              <a:rPr/>
+              <a:t>Read the two parts of RH2</a:t>
+            </a:r>
+          </a:p>
+          <a:p>
+            <a:pPr lvl="0"/>
+            <a:r>
+              <a:rPr/>
+              <a:t>Replace each </a:t>
+            </a:r>
+            <a:r>
+              <a:rPr b="1"/>
+              <a:t>?</a:t>
+            </a:r>
+            <a:r>
+              <a:rPr/>
+              <a:t> in the worksheet grid with </a:t>
+            </a:r>
+            <a:r>
+              <a:rPr b="1"/>
+              <a:t>&lt;</a:t>
+            </a:r>
+            <a:r>
+              <a:rPr/>
+              <a:t>, </a:t>
+            </a:r>
+            <a:r>
+              <a:rPr b="1"/>
+              <a:t>&gt;</a:t>
+            </a:r>
+            <a:r>
+              <a:rPr/>
+              <a:t>, or </a:t>
+            </a:r>
+            <a:r>
+              <a:rPr b="1"/>
+              <a:t>=</a:t>
+            </a:r>
+          </a:p>
+          <a:p>
+            <a:pPr lvl="0"/>
+            <a:r>
+              <a:rPr/>
+              <a:t>Identify the predicted pattern: symmetrical, asymmetrical, or no relationship</a:t>
+            </a:r>
+          </a:p>
+        </p:txBody>
+      </p:sp>
     </p:spTree>
   </p:cSld>
 </p:sld>
@@ -5147,7 +4987,7 @@
             </a:pPr>
             <a:r>
               <a:rPr/>
-              <a:t>11 Repeat the workflow with Hot Ones</a:t>
+              <a:t>10 Run the RH2 chi-square</a:t>
             </a:r>
           </a:p>
         </p:txBody>
@@ -5167,56 +5007,19 @@
           <a:bodyPr/>
           <a:lstStyle/>
           <a:p>
-            <a:pPr lvl="0" indent="-457200" marL="457200">
-              <a:buAutoNum type="arabicPeriod"/>
+            <a:pPr lvl="0" indent="0">
+              <a:buNone/>
             </a:pPr>
             <a:r>
-              <a:rPr/>
-              <a:t>Compute the worksheet transformation.</a:t>
-            </a:r>
-          </a:p>
-          <a:p>
-            <a:pPr lvl="0" indent="-457200" marL="457200">
-              <a:buAutoNum type="arabicPeriod"/>
-            </a:pPr>
-            <a:r>
-              <a:rPr/>
-              <a:t>Select completed challenges: </a:t>
-            </a:r>
-            <a:r>
-              <a:rPr b="1"/>
-              <a:t>result = 1</a:t>
-            </a:r>
-            <a:r>
-              <a:rPr/>
-              <a:t>.</a:t>
-            </a:r>
-          </a:p>
-          <a:p>
-            <a:pPr lvl="0" indent="-457200" marL="457200">
-              <a:buAutoNum type="arabicPeriod"/>
-            </a:pPr>
-            <a:r>
-              <a:rPr/>
-              <a:t>Inspect the plot or contingency table.</a:t>
-            </a:r>
-          </a:p>
-          <a:p>
-            <a:pPr lvl="0" indent="-457200" marL="457200">
-              <a:buAutoNum type="arabicPeriod"/>
-            </a:pPr>
-            <a:r>
-              <a:rPr/>
-              <a:t>Run the matching analysis.</a:t>
-            </a:r>
-          </a:p>
-          <a:p>
-            <a:pPr lvl="0" indent="-457200" marL="457200">
-              <a:buAutoNum type="arabicPeriod"/>
-            </a:pPr>
-            <a:r>
-              <a:rPr/>
-              <a:t>Reset the filter before the next RH.</a:t>
+              <a:rPr>
+                <a:latin typeface="Courier"/>
+              </a:rPr>
+              <a:t>CROSSTABS
+  /TABLES=
+    clark_grp BY tomatometer
+  /STATISTICS=CHISQ
+  /CELLS=COUNT EXPECTED
+    ROW COLUMN.</a:t>
             </a:r>
           </a:p>
         </p:txBody>
@@ -5268,76 +5071,69 @@
             </a:pPr>
             <a:r>
               <a:rPr/>
-              <a:t>12 Complete RH3 through RH6</a:t>
-            </a:r>
-          </a:p>
-        </p:txBody>
-      </p:sp>
-      <p:sp>
-        <p:nvSpPr>
-          <p:cNvPr id="3" name="Content Placeholder 2"/>
-          <p:cNvSpPr>
-            <a:spLocks noGrp="1"/>
-          </p:cNvSpPr>
+              <a:t>11 Describe the RH2 counts first</a:t>
+            </a:r>
+          </a:p>
+        </p:txBody>
+      </p:sp>
+      <p:pic>
+        <p:nvPicPr>
+          <p:cNvPr descr="Clark height group by rating, 8 complete cases. Under 6 ft: 0 Rotten and 2 Fresh, with displayed expected counts 0.2 and 1.8. At least 6 ft: 1 Rotten and 5 Fresh, with displayed expected counts 0.8 and 5.2. Column totals: 1 Rotten and 7 Fresh." id="0" name="Picture 1"/>
+          <p:cNvPicPr>
+            <a:picLocks noGrp="1" noChangeAspect="1"/>
+          </p:cNvPicPr>
+          <p:nvPr/>
+        </p:nvPicPr>
+        <p:blipFill>
+          <a:blip r:embed="rId3"/>
+          <a:stretch>
+            <a:fillRect/>
+          </a:stretch>
+        </p:blipFill>
+        <p:spPr bwMode="auto">
+          <a:xfrm>
+            <a:off x="3454400" y="2628900"/>
+            <a:ext cx="5283200" cy="2590800"/>
+          </a:xfrm>
+          <a:prstGeom prst="rect">
+            <a:avLst/>
+          </a:prstGeom>
+          <a:noFill/>
+          <a:ln w="9525">
+            <a:noFill/>
+            <a:headEnd/>
+            <a:tailEnd/>
+          </a:ln>
+        </p:spPr>
+      </p:pic>
+      <p:sp>
+        <p:nvSpPr>
+          <p:cNvPr id="1" name="TextBox 3"/>
+          <p:cNvSpPr txBox="1"/>
           <p:nvPr>
             <p:ph idx="1"/>
           </p:nvPr>
         </p:nvSpPr>
-        <p:spPr/>
-        <p:txBody>
-          <a:bodyPr/>
-          <a:lstStyle/>
-          <a:p>
-            <a:pPr lvl="0"/>
+        <p:spPr>
+          <a:xfrm>
+            <a:off x="1092200" y="5219700"/>
+            <a:ext cx="9994900" cy="508000"/>
+          </a:xfrm>
+          <a:prstGeom prst="rect">
+            <a:avLst/>
+          </a:prstGeom>
+          <a:noFill/>
+        </p:spPr>
+        <p:txBody>
+          <a:bodyPr/>
+          <a:lstStyle/>
+          <a:p>
+            <a:pPr lvl="0" indent="0" marL="0" algn="ctr">
+              <a:buNone/>
+            </a:pPr>
             <a:r>
               <a:rPr b="1"/>
-              <a:t>RH3:</a:t>
-            </a:r>
-            <a:r>
-              <a:rPr/>
-              <a:t> total heat in millions × views</a:t>
-            </a:r>
-          </a:p>
-          <a:p>
-            <a:pPr lvl="0"/>
-            <a:r>
-              <a:rPr b="1"/>
-              <a:t>RH4:</a:t>
-            </a:r>
-            <a:r>
-              <a:rPr/>
-              <a:t> total heat in millions × engagement</a:t>
-            </a:r>
-          </a:p>
-          <a:p>
-            <a:pPr lvl="0"/>
-            <a:r>
-              <a:rPr b="1"/>
-              <a:t>RH5:</a:t>
-            </a:r>
-            <a:r>
-              <a:rPr/>
-              <a:t> actor status × popularity</a:t>
-            </a:r>
-          </a:p>
-          <a:p>
-            <a:pPr lvl="0"/>
-            <a:r>
-              <a:rPr b="1"/>
-              <a:t>RH6:</a:t>
-            </a:r>
-            <a:r>
-              <a:rPr/>
-              <a:t> age group × popularity</a:t>
-            </a:r>
-          </a:p>
-          <a:p>
-            <a:pPr lvl="0" indent="0" marL="0">
-              <a:buNone/>
-            </a:pPr>
-            <a:r>
-              <a:rPr/>
-              <a:t>Save syntax for every transformation and filter.</a:t>
+              <a:t>How does each row compare with the RH?</a:t>
             </a:r>
           </a:p>
         </p:txBody>
@@ -5389,79 +5185,22 @@
             </a:pPr>
             <a:r>
               <a:rPr/>
-              <a:t>13 Build the correlation table</a:t>
-            </a:r>
-          </a:p>
-        </p:txBody>
-      </p:sp>
-      <p:pic>
-        <p:nvPicPr>
-          <p:cNvPr descr="APA-style table with means, standard deviations, and the correlation between height difference and Letterboxd likes in thousands" id="0" name="Picture 1"/>
-          <p:cNvPicPr>
-            <a:picLocks noGrp="1" noChangeAspect="1"/>
-          </p:cNvPicPr>
-          <p:nvPr/>
-        </p:nvPicPr>
-        <p:blipFill>
-          <a:blip r:embed="rId3"/>
-          <a:stretch>
-            <a:fillRect/>
-          </a:stretch>
-        </p:blipFill>
-        <p:spPr bwMode="auto">
-          <a:xfrm>
-            <a:off x="1092200" y="3060700"/>
-            <a:ext cx="9994900" cy="2235200"/>
-          </a:xfrm>
-          <a:prstGeom prst="rect">
-            <a:avLst/>
-          </a:prstGeom>
-          <a:noFill/>
-          <a:ln w="9525">
-            <a:noFill/>
-            <a:headEnd/>
-            <a:tailEnd/>
-          </a:ln>
-        </p:spPr>
-      </p:pic>
-    </p:spTree>
-  </p:cSld>
-</p:sld>
-</file>
-
-<file path=ppt/slides/slide15.xml><?xml version="1.0" encoding="utf-8"?>
-<p:sld xmlns:a="http://schemas.openxmlformats.org/drawingml/2006/main" xmlns:r="http://schemas.openxmlformats.org/officeDocument/2006/relationships" xmlns:p="http://schemas.openxmlformats.org/presentationml/2006/main">
-  <p:cSld>
-    <p:spTree>
-      <p:nvGrpSpPr>
-        <p:cNvPr id="1" name=""/>
-        <p:cNvGrpSpPr/>
-        <p:nvPr/>
-      </p:nvGrpSpPr>
-      <p:grpSpPr>
-        <a:xfrm>
-          <a:off x="0" y="0"/>
-          <a:ext cx="0" cy="0"/>
-          <a:chOff x="0" y="0"/>
-          <a:chExt cx="0" cy="0"/>
-        </a:xfrm>
-      </p:grpSpPr>
-      <p:sp>
-        <p:nvSpPr>
-          <p:cNvPr id="2" name="Title 1"/>
-          <p:cNvSpPr>
-            <a:spLocks noGrp="1"/>
-          </p:cNvSpPr>
-          <p:nvPr>
-            <p:ph type="title"/>
-          </p:nvPr>
-        </p:nvSpPr>
-        <p:spPr>
-          <a:xfrm>
-            <a:off x="1097280" y="964692"/>
-            <a:ext cx="9997440" cy="1188720"/>
-          </a:xfrm>
-        </p:spPr>
+              <a:t>12 Report RH2 in Table 2</a:t>
+            </a:r>
+          </a:p>
+        </p:txBody>
+      </p:sp>
+      <p:sp>
+        <p:nvSpPr>
+          <p:cNvPr id="3" name="Content Placeholder 2"/>
+          <p:cNvSpPr>
+            <a:spLocks noGrp="1"/>
+          </p:cNvSpPr>
+          <p:nvPr>
+            <p:ph idx="1"/>
+          </p:nvPr>
+        </p:nvSpPr>
+        <p:spPr/>
         <p:txBody>
           <a:bodyPr/>
           <a:lstStyle/>
@@ -5471,174 +5210,32 @@
             </a:pPr>
             <a:r>
               <a:rPr/>
-              <a:t>14 Build the contingency table</a:t>
-            </a:r>
-          </a:p>
-        </p:txBody>
-      </p:sp>
-      <p:pic>
-        <p:nvPicPr>
-          <p:cNvPr descr="APA-style contingency table showing Clark height group by Rotten versus Fresh rating with counts, percentages, and chi-square results" id="0" name="Picture 1"/>
-          <p:cNvPicPr>
-            <a:picLocks noGrp="1" noChangeAspect="1"/>
-          </p:cNvPicPr>
-          <p:nvPr/>
-        </p:nvPicPr>
-        <p:blipFill>
-          <a:blip r:embed="rId3"/>
-          <a:stretch>
-            <a:fillRect/>
-          </a:stretch>
-        </p:blipFill>
-        <p:spPr bwMode="auto">
-          <a:xfrm>
-            <a:off x="4318000" y="2628900"/>
-            <a:ext cx="3543300" cy="3098800"/>
-          </a:xfrm>
-          <a:prstGeom prst="rect">
-            <a:avLst/>
-          </a:prstGeom>
-          <a:noFill/>
-          <a:ln w="9525">
-            <a:noFill/>
-            <a:headEnd/>
-            <a:tailEnd/>
-          </a:ln>
-        </p:spPr>
-      </p:pic>
-    </p:spTree>
-  </p:cSld>
-</p:sld>
-</file>
-
-<file path=ppt/slides/slide16.xml><?xml version="1.0" encoding="utf-8"?>
-<p:sld xmlns:a="http://schemas.openxmlformats.org/drawingml/2006/main" xmlns:r="http://schemas.openxmlformats.org/officeDocument/2006/relationships" xmlns:p="http://schemas.openxmlformats.org/presentationml/2006/main">
-  <p:cSld>
-    <p:spTree>
-      <p:nvGrpSpPr>
-        <p:cNvPr id="1" name=""/>
-        <p:cNvGrpSpPr/>
-        <p:nvPr/>
-      </p:nvGrpSpPr>
-      <p:grpSpPr>
-        <a:xfrm>
-          <a:off x="0" y="0"/>
-          <a:ext cx="0" cy="0"/>
-          <a:chOff x="0" y="0"/>
-          <a:chExt cx="0" cy="0"/>
-        </a:xfrm>
-      </p:grpSpPr>
-      <p:sp>
-        <p:nvSpPr>
-          <p:cNvPr id="2" name="Title 1"/>
-          <p:cNvSpPr>
-            <a:spLocks noGrp="1"/>
-          </p:cNvSpPr>
-          <p:nvPr>
-            <p:ph type="title"/>
-          </p:nvPr>
-        </p:nvSpPr>
-        <p:spPr>
-          <a:xfrm>
-            <a:off x="1097280" y="964692"/>
-            <a:ext cx="9997440" cy="1188720"/>
-          </a:xfrm>
-        </p:spPr>
-        <p:txBody>
-          <a:bodyPr/>
-          <a:lstStyle/>
-          <a:p>
-            <a:pPr lvl="0" indent="0" marL="0">
-              <a:buNone/>
-            </a:pPr>
+              <a:t>[Finish RH2]</a:t>
+            </a:r>
+          </a:p>
+          <a:p>
+            <a:pPr lvl="0"/>
             <a:r>
               <a:rPr/>
-              <a:t>15 Write in evidence order</a:t>
-            </a:r>
-          </a:p>
-        </p:txBody>
-      </p:sp>
-      <p:sp>
-        <p:nvSpPr>
-          <p:cNvPr id="3" name="Content Placeholder 2"/>
-          <p:cNvSpPr>
-            <a:spLocks noGrp="1"/>
-          </p:cNvSpPr>
-          <p:nvPr>
-            <p:ph idx="1"/>
-          </p:nvPr>
-        </p:nvSpPr>
-        <p:spPr/>
-        <p:txBody>
-          <a:bodyPr/>
-          <a:lstStyle/>
-          <a:p>
-            <a:pPr lvl="0" indent="-457200" marL="457200">
-              <a:buAutoNum type="arabicPeriod"/>
-            </a:pPr>
+              <a:t>Complete the worksheet’s </a:t>
+            </a:r>
+            <a:r>
+              <a:rPr b="1"/>
+              <a:t>Table 2</a:t>
+            </a:r>
+          </a:p>
+          <a:p>
+            <a:pPr lvl="0"/>
             <a:r>
               <a:rPr/>
-              <a:t>State the predicted relationship or cell pattern.</a:t>
-            </a:r>
-          </a:p>
-          <a:p>
-            <a:pPr lvl="0" indent="-457200" marL="457200">
-              <a:buAutoNum type="arabicPeriod"/>
-            </a:pPr>
+              <a:t>Refer to Table 2 when describing the pattern and test result</a:t>
+            </a:r>
+          </a:p>
+          <a:p>
+            <a:pPr lvl="0"/>
             <a:r>
               <a:rPr/>
-              <a:t>Describe the table or plot.</a:t>
-            </a:r>
-          </a:p>
-          <a:p>
-            <a:pPr lvl="0" indent="-457200" marL="457200">
-              <a:buAutoNum type="arabicPeriod"/>
-            </a:pPr>
-            <a:r>
-              <a:rPr/>
-              <a:t>Report </a:t>
-            </a:r>
-            <a:r>
-              <a:rPr i="1"/>
-              <a:t>r</a:t>
-            </a:r>
-            <a:r>
-              <a:rPr/>
-              <a:t> or χ² with </a:t>
-            </a:r>
-            <a:r>
-              <a:rPr i="1"/>
-              <a:t>df</a:t>
-            </a:r>
-            <a:r>
-              <a:rPr/>
-              <a:t> and </a:t>
-            </a:r>
-            <a:r>
-              <a:rPr i="1"/>
-              <a:t>p</a:t>
-            </a:r>
-            <a:r>
-              <a:rPr/>
-              <a:t>.</a:t>
-            </a:r>
-          </a:p>
-          <a:p>
-            <a:pPr lvl="0" indent="-457200" marL="457200">
-              <a:buAutoNum type="arabicPeriod"/>
-            </a:pPr>
-            <a:r>
-              <a:rPr/>
-              <a:t>State whether the RH is supported.</a:t>
-            </a:r>
-          </a:p>
-          <a:p>
-            <a:pPr lvl="0" indent="-457200" marL="457200">
-              <a:buAutoNum type="arabicPeriod"/>
-            </a:pPr>
-            <a:r>
-              <a:rPr/>
-              <a:t>Add the all-green checker screenshot.</a:t>
+              <a:t>Add the required screenshot of correct checker answers</a:t>
             </a:r>
           </a:p>
         </p:txBody>
@@ -5690,14 +5287,14 @@
             </a:pPr>
             <a:r>
               <a:rPr/>
-              <a:t>1 Download the Lab 7 files</a:t>
-            </a:r>
-          </a:p>
-        </p:txBody>
-      </p:sp>
-      <p:sp>
-        <p:nvSpPr>
-          <p:cNvPr id="1001" name="card-steel" descr="card: Worksheet. Download worksheet"/>
+              <a:t>1 Open the Lab 07 files</a:t>
+            </a:r>
+          </a:p>
+        </p:txBody>
+      </p:sp>
+      <p:sp>
+        <p:nvSpPr>
+          <p:cNvPr id="1001" name="card-steel" descr="card: Walkthrough data. Superman data"/>
           <p:cNvSpPr/>
           <p:nvPr/>
         </p:nvSpPr>
@@ -5733,7 +5330,7 @@
                   <a:srgbClr val="010B13"/>
                 </a:solidFill>
               </a:rPr>
-              <a:t>Worksheet</a:t>
+              <a:t>Walkthrough data</a:t>
             </a:r>
           </a:p>
           <a:p>
@@ -5743,16 +5340,21 @@
                 <a:solidFill>
                   <a:srgbClr val="010B13"/>
                 </a:solidFill>
-                <a:hlinkClick r:id="rId3"/>
               </a:rPr>
-              <a:t>Download worksheet</a:t>
-            </a:r>
-          </a:p>
-        </p:txBody>
-      </p:sp>
-      <p:sp>
-        <p:nvSpPr>
-          <p:cNvPr id="1002" name="card-rail" descr=""/>
+              <a:t>Superman data</a:t>
+            </a:r>
+          </a:p>
+        </p:txBody>
+      </p:sp>
+      <p:sp>
+        <p:nvSpPr>
+          <p:cNvPr id="1002" name="card-rail" descr="">
+            <a:extLst>
+              <a:ext uri="{C183D7F6-B498-43B3-948B-1728B52AA6E4}">
+                <adec:decorative xmlns:adec="http://schemas.microsoft.com/office/drawing/2017/decorative" val="1"/>
+              </a:ext>
+            </a:extLst>
+          </p:cNvPr>
           <p:cNvSpPr/>
           <p:nvPr/>
         </p:nvSpPr>
@@ -5783,185 +5385,13 @@
       </p:sp>
       <p:sp>
         <p:nvSpPr>
-          <p:cNvPr id="1003" name="card-steel" descr="card: Walkthrough data. Download Superman data"/>
+          <p:cNvPr id="1003" name="card-steel" descr="card: Simple SPSS guides. Correlation PDF Scatterplot PDF Chi-square PDF"/>
           <p:cNvSpPr/>
           <p:nvPr/>
         </p:nvSpPr>
         <p:spPr>
           <a:xfrm>
             <a:off x="6167628" y="2633472"/>
-            <a:ext cx="4924044" cy="1005840"/>
-          </a:xfrm>
-          <a:prstGeom prst="roundRect">
-            <a:avLst>
-              <a:gd name="adj" fmla="val 6000"/>
-            </a:avLst>
-          </a:prstGeom>
-          <a:solidFill>
-            <a:srgbClr val="FEFDFA"/>
-          </a:solidFill>
-          <a:ln w="19050">
-            <a:solidFill>
-              <a:srgbClr val="CCCCCC"/>
-            </a:solidFill>
-          </a:ln>
-        </p:spPr>
-        <p:txBody>
-          <a:bodyPr lIns="182880" tIns="182880" rIns="182880" bIns="182880" anchor="t" wrap="square">
-            <a:normAutofit/>
-          </a:bodyPr>
-          <a:lstStyle/>
-          <a:p>
-            <a:pPr algn="l"/>
-            <a:r>
-              <a:rPr lang="en-US" sz="2200" b="1" dirty="0">
-                <a:solidFill>
-                  <a:srgbClr val="010B13"/>
-                </a:solidFill>
-              </a:rPr>
-              <a:t>Walkthrough data</a:t>
-            </a:r>
-          </a:p>
-          <a:p>
-            <a:pPr algn="l"/>
-            <a:r>
-              <a:rPr lang="en-US" sz="2000" b="0" dirty="0">
-                <a:solidFill>
-                  <a:srgbClr val="010B13"/>
-                </a:solidFill>
-                <a:hlinkClick r:id="rId4"/>
-              </a:rPr>
-              <a:t>Download Superman data</a:t>
-            </a:r>
-          </a:p>
-        </p:txBody>
-      </p:sp>
-      <p:sp>
-        <p:nvSpPr>
-          <p:cNvPr id="1004" name="card-rail" descr=""/>
-          <p:cNvSpPr/>
-          <p:nvPr/>
-        </p:nvSpPr>
-        <p:spPr>
-          <a:xfrm>
-            <a:off x="6167628" y="2633472"/>
-            <a:ext cx="54864" cy="1005840"/>
-          </a:xfrm>
-          <a:prstGeom prst="roundRect">
-            <a:avLst>
-              <a:gd name="adj" fmla="val 20000"/>
-            </a:avLst>
-          </a:prstGeom>
-          <a:solidFill>
-            <a:srgbClr val="010B13"/>
-          </a:solidFill>
-          <a:ln>
-            <a:noFill/>
-          </a:ln>
-        </p:spPr>
-        <p:txBody>
-          <a:bodyPr lIns="182880" tIns="182880" rIns="182880" bIns="182880" anchor="t" wrap="square">
-            <a:normAutofit/>
-          </a:bodyPr>
-          <a:lstStyle/>
-          <a:p/>
-        </p:txBody>
-      </p:sp>
-      <p:sp>
-        <p:nvSpPr>
-          <p:cNvPr id="1005" name="card-steel" descr="card: Your-turn data. Download Hot Ones data"/>
-          <p:cNvSpPr/>
-          <p:nvPr/>
-        </p:nvSpPr>
-        <p:spPr>
-          <a:xfrm>
-            <a:off x="1097280" y="3785616"/>
-            <a:ext cx="4924044" cy="1005840"/>
-          </a:xfrm>
-          <a:prstGeom prst="roundRect">
-            <a:avLst>
-              <a:gd name="adj" fmla="val 6000"/>
-            </a:avLst>
-          </a:prstGeom>
-          <a:solidFill>
-            <a:srgbClr val="FEFDFA"/>
-          </a:solidFill>
-          <a:ln w="19050">
-            <a:solidFill>
-              <a:srgbClr val="CCCCCC"/>
-            </a:solidFill>
-          </a:ln>
-        </p:spPr>
-        <p:txBody>
-          <a:bodyPr lIns="182880" tIns="182880" rIns="182880" bIns="182880" anchor="t" wrap="square">
-            <a:normAutofit/>
-          </a:bodyPr>
-          <a:lstStyle/>
-          <a:p>
-            <a:pPr algn="l"/>
-            <a:r>
-              <a:rPr lang="en-US" sz="2200" b="1" dirty="0">
-                <a:solidFill>
-                  <a:srgbClr val="010B13"/>
-                </a:solidFill>
-              </a:rPr>
-              <a:t>Your-turn data</a:t>
-            </a:r>
-          </a:p>
-          <a:p>
-            <a:pPr algn="l"/>
-            <a:r>
-              <a:rPr lang="en-US" sz="2000" b="0" dirty="0">
-                <a:solidFill>
-                  <a:srgbClr val="010B13"/>
-                </a:solidFill>
-                <a:hlinkClick r:id="rId5"/>
-              </a:rPr>
-              <a:t>Download Hot Ones data</a:t>
-            </a:r>
-          </a:p>
-        </p:txBody>
-      </p:sp>
-      <p:sp>
-        <p:nvSpPr>
-          <p:cNvPr id="1006" name="card-rail" descr=""/>
-          <p:cNvSpPr/>
-          <p:nvPr/>
-        </p:nvSpPr>
-        <p:spPr>
-          <a:xfrm>
-            <a:off x="1097280" y="3785616"/>
-            <a:ext cx="54864" cy="1005840"/>
-          </a:xfrm>
-          <a:prstGeom prst="roundRect">
-            <a:avLst>
-              <a:gd name="adj" fmla="val 20000"/>
-            </a:avLst>
-          </a:prstGeom>
-          <a:solidFill>
-            <a:srgbClr val="010B13"/>
-          </a:solidFill>
-          <a:ln>
-            <a:noFill/>
-          </a:ln>
-        </p:spPr>
-        <p:txBody>
-          <a:bodyPr lIns="182880" tIns="182880" rIns="182880" bIns="182880" anchor="t" wrap="square">
-            <a:normAutofit/>
-          </a:bodyPr>
-          <a:lstStyle/>
-          <a:p/>
-        </p:txBody>
-      </p:sp>
-      <p:sp>
-        <p:nvSpPr>
-          <p:cNvPr id="1007" name="card-steel" descr="card: SPSS guides. Correlation Scatterplot Chi-square"/>
-          <p:cNvSpPr/>
-          <p:nvPr/>
-        </p:nvSpPr>
-        <p:spPr>
-          <a:xfrm>
-            <a:off x="6167628" y="3785616"/>
             <a:ext cx="4924044" cy="1615440"/>
           </a:xfrm>
           <a:prstGeom prst="roundRect">
@@ -5991,7 +5421,7 @@
                   <a:srgbClr val="010B13"/>
                 </a:solidFill>
               </a:rPr>
-              <a:t>SPSS guides</a:t>
+              <a:t>Simple SPSS guides</a:t>
             </a:r>
           </a:p>
           <a:p>
@@ -6001,8 +5431,9 @@
                 <a:solidFill>
                   <a:srgbClr val="010B13"/>
                 </a:solidFill>
+                <a:hlinkClick r:id="rId3"/>
               </a:rPr>
-              <a:t>Correlation</a:t>
+              <a:t>Correlation PDF</a:t>
             </a:r>
           </a:p>
           <a:p>
@@ -6012,9 +5443,9 @@
                 <a:solidFill>
                   <a:srgbClr val="010B13"/>
                 </a:solidFill>
-                <a:hlinkClick r:id="rId6"/>
+                <a:hlinkClick r:id="rId4"/>
               </a:rPr>
-              <a:t>Scatterplot</a:t>
+              <a:t>Scatterplot PDF</a:t>
             </a:r>
           </a:p>
           <a:p>
@@ -6024,22 +5455,28 @@
                 <a:solidFill>
                   <a:srgbClr val="010B13"/>
                 </a:solidFill>
-                <a:hlinkClick r:id="rId7"/>
+                <a:hlinkClick r:id="rId5"/>
               </a:rPr>
-              <a:t>Chi-square</a:t>
-            </a:r>
-          </a:p>
-        </p:txBody>
-      </p:sp>
-      <p:sp>
-        <p:nvSpPr>
-          <p:cNvPr id="1008" name="card-rail" descr=""/>
+              <a:t>Chi-square PDF</a:t>
+            </a:r>
+          </a:p>
+        </p:txBody>
+      </p:sp>
+      <p:sp>
+        <p:nvSpPr>
+          <p:cNvPr id="1004" name="card-rail" descr="">
+            <a:extLst>
+              <a:ext uri="{C183D7F6-B498-43B3-948B-1728B52AA6E4}">
+                <adec:decorative xmlns:adec="http://schemas.microsoft.com/office/drawing/2017/decorative" val="1"/>
+              </a:ext>
+            </a:extLst>
+          </p:cNvPr>
           <p:cNvSpPr/>
           <p:nvPr/>
         </p:nvSpPr>
         <p:spPr>
           <a:xfrm>
-            <a:off x="6167628" y="3785616"/>
+            <a:off x="6167628" y="2633472"/>
             <a:ext cx="54864" cy="1615440"/>
           </a:xfrm>
           <a:prstGeom prst="roundRect">
@@ -6086,7 +5523,7 @@
       </p:grpSpPr>
       <p:sp>
         <p:nvSpPr>
-          <p:cNvPr id="10" name="Title 9"/>
+          <p:cNvPr id="2" name="Title 1"/>
           <p:cNvSpPr>
             <a:spLocks noGrp="1"/>
           </p:cNvSpPr>
@@ -6094,7 +5531,12 @@
             <p:ph type="title"/>
           </p:nvPr>
         </p:nvSpPr>
-        <p:spPr/>
+        <p:spPr>
+          <a:xfrm>
+            <a:off x="1097280" y="964692"/>
+            <a:ext cx="9997440" cy="1188720"/>
+          </a:xfrm>
+        </p:spPr>
         <p:txBody>
           <a:bodyPr/>
           <a:lstStyle/>
@@ -6104,19 +5546,19 @@
             </a:pPr>
             <a:r>
               <a:rPr/>
-              <a:t>2 Keep Data and Syntax Editors open</a:t>
-            </a:r>
-          </a:p>
-        </p:txBody>
-      </p:sp>
-      <p:sp>
-        <p:nvSpPr>
-          <p:cNvPr id="3" name="Text Placeholder 2"/>
-          <p:cNvSpPr>
-            <a:spLocks noGrp="1"/>
-          </p:cNvSpPr>
-          <p:nvPr>
-            <p:ph idx="1" type="body"/>
+              <a:t>2 Check the dataset before analysis</a:t>
+            </a:r>
+          </a:p>
+        </p:txBody>
+      </p:sp>
+      <p:sp>
+        <p:nvSpPr>
+          <p:cNvPr id="3" name="Content Placeholder 2"/>
+          <p:cNvSpPr>
+            <a:spLocks noGrp="1"/>
+          </p:cNvSpPr>
+          <p:nvPr>
+            <p:ph idx="1"/>
           </p:nvPr>
         </p:nvSpPr>
         <p:spPr/>
@@ -6128,143 +5570,37 @@
               <a:buNone/>
             </a:pPr>
             <a:r>
+              <a:rPr/>
+              <a:t>[Worksheet setup]</a:t>
+            </a:r>
+          </a:p>
+          <a:p>
+            <a:pPr lvl="0"/>
+            <a:r>
+              <a:rPr/>
+              <a:t>Check variable labels and category value labels</a:t>
+            </a:r>
+          </a:p>
+          <a:p>
+            <a:pPr lvl="0"/>
+            <a:r>
+              <a:rPr/>
+              <a:t>Confirm that </a:t>
+            </a:r>
+            <a:r>
               <a:rPr b="1"/>
-              <a:t>Data Editor</a:t>
-            </a:r>
-          </a:p>
-        </p:txBody>
-      </p:sp>
-      <p:pic>
-        <p:nvPicPr>
-          <p:cNvPr descr="Focused SPSS Data Editor image showing spreadsheet columns and the Data View and Variable View tabs" id="0" name="Picture 1"/>
-          <p:cNvPicPr>
-            <a:picLocks noGrp="1" noChangeAspect="1"/>
-          </p:cNvPicPr>
-          <p:nvPr/>
-        </p:nvPicPr>
-        <p:blipFill>
-          <a:blip r:embed="rId3"/>
-          <a:stretch>
-            <a:fillRect/>
-          </a:stretch>
-        </p:blipFill>
-        <p:spPr bwMode="auto">
-          <a:xfrm>
-            <a:off x="1574800" y="3416300"/>
-            <a:ext cx="4267200" cy="2032000"/>
-          </a:xfrm>
-          <a:prstGeom prst="rect">
-            <a:avLst/>
-          </a:prstGeom>
-          <a:noFill/>
-          <a:ln w="9525">
-            <a:noFill/>
-            <a:headEnd/>
-            <a:tailEnd/>
-          </a:ln>
-        </p:spPr>
-      </p:pic>
-      <p:sp>
-        <p:nvSpPr>
-          <p:cNvPr id="4" name="Content Placeholder 3"/>
-          <p:cNvSpPr>
-            <a:spLocks noGrp="1"/>
-          </p:cNvSpPr>
-          <p:nvPr>
-            <p:ph idx="2" sz="half"/>
-          </p:nvPr>
-        </p:nvSpPr>
-        <p:spPr/>
-        <p:txBody>
-          <a:bodyPr/>
-          <a:lstStyle/>
-          <a:p>
-            <a:pPr lvl="0" indent="0" marL="0">
-              <a:buNone/>
-            </a:pPr>
-            <a:r>
-              <a:rPr b="1"/>
-              <a:t>Inspect variables and cases</a:t>
-            </a:r>
-          </a:p>
-        </p:txBody>
-      </p:sp>
-      <p:sp>
-        <p:nvSpPr>
-          <p:cNvPr id="11" name="Text Placeholder 4"/>
-          <p:cNvSpPr>
-            <a:spLocks noGrp="1"/>
-          </p:cNvSpPr>
-          <p:nvPr>
-            <p:ph idx="13" sz="quarter" type="body"/>
-          </p:nvPr>
-        </p:nvSpPr>
-        <p:spPr/>
-        <p:txBody>
-          <a:bodyPr/>
-          <a:lstStyle/>
-          <a:p>
-            <a:pPr lvl="0" indent="0" marL="0">
-              <a:buNone/>
-            </a:pPr>
-            <a:r>
-              <a:rPr b="1"/>
-              <a:t>Syntax Editor</a:t>
-            </a:r>
-          </a:p>
-        </p:txBody>
-      </p:sp>
-      <p:pic>
-        <p:nvPicPr>
-          <p:cNvPr descr="Focused SPSS Syntax Editor image showing the command area and an annotation pointing to the green Run button" id="0" name="Picture 1"/>
-          <p:cNvPicPr>
-            <a:picLocks noGrp="1" noChangeAspect="1"/>
-          </p:cNvPicPr>
-          <p:nvPr/>
-        </p:nvPicPr>
-        <p:blipFill>
-          <a:blip r:embed="rId4"/>
-          <a:stretch>
-            <a:fillRect/>
-          </a:stretch>
-        </p:blipFill>
-        <p:spPr bwMode="auto">
-          <a:xfrm>
-            <a:off x="6337300" y="3429000"/>
-            <a:ext cx="4241800" cy="2006600"/>
-          </a:xfrm>
-          <a:prstGeom prst="rect">
-            <a:avLst/>
-          </a:prstGeom>
-          <a:noFill/>
-          <a:ln w="9525">
-            <a:noFill/>
-            <a:headEnd/>
-            <a:tailEnd/>
-          </a:ln>
-        </p:spPr>
-      </p:pic>
-      <p:sp>
-        <p:nvSpPr>
-          <p:cNvPr id="6" name="Content Placeholder 5"/>
-          <p:cNvSpPr>
-            <a:spLocks noGrp="1"/>
-          </p:cNvSpPr>
-          <p:nvPr>
-            <p:ph idx="4" sz="quarter"/>
-          </p:nvPr>
-        </p:nvSpPr>
-        <p:spPr/>
-        <p:txBody>
-          <a:bodyPr/>
-          <a:lstStyle/>
-          <a:p>
-            <a:pPr lvl="0" indent="0" marL="0">
-              <a:buNone/>
-            </a:pPr>
-            <a:r>
-              <a:rPr b="1"/>
-              <a:t>Save and rerun commands</a:t>
+              <a:t>−99</a:t>
+            </a:r>
+            <a:r>
+              <a:rPr/>
+              <a:t> is declared missing</a:t>
+            </a:r>
+          </a:p>
+          <a:p>
+            <a:pPr lvl="0"/>
+            <a:r>
+              <a:rPr/>
+              <a:t>Keep the Data Editor, saved syntax, and Output Viewer open</a:t>
             </a:r>
           </a:p>
         </p:txBody>
@@ -6316,89 +5652,7 @@
             </a:pPr>
             <a:r>
               <a:rPr/>
-              <a:t>3 Read results in Output Viewer</a:t>
-            </a:r>
-          </a:p>
-        </p:txBody>
-      </p:sp>
-      <p:pic>
-        <p:nvPicPr>
-          <p:cNvPr descr="SPSS-style correlation output for height difference and Letterboxd likes in thousands, showing r equals .935, p equals .020, and 5 complete pairs" id="0" name="Picture 1"/>
-          <p:cNvPicPr>
-            <a:picLocks noGrp="1" noChangeAspect="1"/>
-          </p:cNvPicPr>
-          <p:nvPr/>
-        </p:nvPicPr>
-        <p:blipFill>
-          <a:blip r:embed="rId3"/>
-          <a:stretch>
-            <a:fillRect/>
-          </a:stretch>
-        </p:blipFill>
-        <p:spPr bwMode="auto">
-          <a:xfrm>
-            <a:off x="3048000" y="2628900"/>
-            <a:ext cx="6083300" cy="3098800"/>
-          </a:xfrm>
-          <a:prstGeom prst="rect">
-            <a:avLst/>
-          </a:prstGeom>
-          <a:noFill/>
-          <a:ln w="9525">
-            <a:noFill/>
-            <a:headEnd/>
-            <a:tailEnd/>
-          </a:ln>
-        </p:spPr>
-      </p:pic>
-    </p:spTree>
-  </p:cSld>
-</p:sld>
-</file>
-
-<file path=ppt/slides/slide5.xml><?xml version="1.0" encoding="utf-8"?>
-<p:sld xmlns:a="http://schemas.openxmlformats.org/drawingml/2006/main" xmlns:r="http://schemas.openxmlformats.org/officeDocument/2006/relationships" xmlns:p="http://schemas.openxmlformats.org/presentationml/2006/main">
-  <p:cSld>
-    <p:spTree>
-      <p:nvGrpSpPr>
-        <p:cNvPr id="1" name=""/>
-        <p:cNvGrpSpPr/>
-        <p:nvPr/>
-      </p:nvGrpSpPr>
-      <p:grpSpPr>
-        <a:xfrm>
-          <a:off x="0" y="0"/>
-          <a:ext cx="0" cy="0"/>
-          <a:chOff x="0" y="0"/>
-          <a:chExt cx="0" cy="0"/>
-        </a:xfrm>
-      </p:grpSpPr>
-      <p:sp>
-        <p:nvSpPr>
-          <p:cNvPr id="2" name="Title 1"/>
-          <p:cNvSpPr>
-            <a:spLocks noGrp="1"/>
-          </p:cNvSpPr>
-          <p:nvPr>
-            <p:ph type="title"/>
-          </p:nvPr>
-        </p:nvSpPr>
-        <p:spPr>
-          <a:xfrm>
-            <a:off x="1097280" y="964692"/>
-            <a:ext cx="9997440" cy="1188720"/>
-          </a:xfrm>
-        </p:spPr>
-        <p:txBody>
-          <a:bodyPr/>
-          <a:lstStyle/>
-          <a:p>
-            <a:pPr lvl="0" indent="0" marL="0">
-              <a:buNone/>
-            </a:pPr>
-            <a:r>
-              <a:rPr/>
-              <a:t>4 Variable types choose the test</a:t>
+              <a:t>3 Choose the test for the variables</a:t>
             </a:r>
           </a:p>
         </p:txBody>
@@ -6424,8 +5678,8 @@
                 <a:tableStyleId>{5C22544A-7EE6-4342-B048-85BDC9FD1C3A}</a:tableStyleId>
               </a:tblPr>
               <a:tblGrid>
-                <a:gridCol w="4991100"/>
-                <a:gridCol w="4991100"/>
+                <a:gridCol w="5003800"/>
+                <a:gridCol w="5003800"/>
               </a:tblGrid>
               <a:tr h="0">
                 <a:tc>
@@ -6438,7 +5692,7 @@
                       </a:pPr>
                       <a:r>
                         <a:rPr/>
-                        <a:t>Variables in the hypothesis</a:t>
+                        <a:t>Variables in the RH</a:t>
                       </a:r>
                     </a:p>
                   </a:txBody>
@@ -6454,7 +5708,7 @@
                       </a:pPr>
                       <a:r>
                         <a:rPr/>
-                        <a:t>Use</a:t>
+                        <a:t>Analysis</a:t>
                       </a:r>
                     </a:p>
                   </a:txBody>
@@ -6487,7 +5741,7 @@
                       </a:pPr>
                       <a:r>
                         <a:rPr/>
-                        <a:t>Pearson correlation</a:t>
+                        <a:t>Pearson correlation for a linear relationship</a:t>
                       </a:r>
                     </a:p>
                   </a:txBody>
@@ -6519,7 +5773,7 @@
                       </a:pPr>
                       <a:r>
                         <a:rPr/>
-                        <a:t>Chi-square association test</a:t>
+                        <a:t>Chi-square test of association</a:t>
                       </a:r>
                     </a:p>
                   </a:txBody>
@@ -6529,6 +5783,83 @@
           </a:graphicData>
         </a:graphic>
       </p:graphicFrame>
+    </p:spTree>
+  </p:cSld>
+</p:sld>
+</file>
+
+<file path=ppt/slides/slide5.xml><?xml version="1.0" encoding="utf-8"?>
+<p:sld xmlns:a="http://schemas.openxmlformats.org/drawingml/2006/main" xmlns:r="http://schemas.openxmlformats.org/officeDocument/2006/relationships" xmlns:p="http://schemas.openxmlformats.org/presentationml/2006/main">
+  <p:cSld>
+    <p:spTree>
+      <p:nvGrpSpPr>
+        <p:cNvPr id="1" name=""/>
+        <p:cNvGrpSpPr/>
+        <p:nvPr/>
+      </p:nvGrpSpPr>
+      <p:grpSpPr>
+        <a:xfrm>
+          <a:off x="0" y="0"/>
+          <a:ext cx="0" cy="0"/>
+          <a:chOff x="0" y="0"/>
+          <a:chExt cx="0" cy="0"/>
+        </a:xfrm>
+      </p:grpSpPr>
+      <p:sp>
+        <p:nvSpPr>
+          <p:cNvPr id="2" name="Title 1"/>
+          <p:cNvSpPr>
+            <a:spLocks noGrp="1"/>
+          </p:cNvSpPr>
+          <p:nvPr>
+            <p:ph type="title"/>
+          </p:nvPr>
+        </p:nvSpPr>
+        <p:spPr>
+          <a:xfrm>
+            <a:off x="1097280" y="964692"/>
+            <a:ext cx="9997440" cy="1188720"/>
+          </a:xfrm>
+        </p:spPr>
+        <p:txBody>
+          <a:bodyPr/>
+          <a:lstStyle/>
+          <a:p>
+            <a:pPr lvl="0" indent="0" marL="0">
+              <a:buNone/>
+            </a:pPr>
+            <a:r>
+              <a:rPr/>
+              <a:t>3 Choose the test for the variables (continued)</a:t>
+            </a:r>
+          </a:p>
+        </p:txBody>
+      </p:sp>
+      <p:sp>
+        <p:nvSpPr>
+          <p:cNvPr id="3" name="Content Placeholder 2"/>
+          <p:cNvSpPr>
+            <a:spLocks noGrp="1"/>
+          </p:cNvSpPr>
+          <p:nvPr>
+            <p:ph idx="1"/>
+          </p:nvPr>
+        </p:nvSpPr>
+        <p:spPr/>
+        <p:txBody>
+          <a:bodyPr/>
+          <a:lstStyle/>
+          <a:p>
+            <a:pPr lvl="0" indent="0" marL="0">
+              <a:buNone/>
+            </a:pPr>
+            <a:r>
+              <a:rPr b="1"/>
+              <a:t>Numeric codes can represent categories</a:t>
+            </a:r>
+          </a:p>
+        </p:txBody>
+      </p:sp>
     </p:spTree>
   </p:cSld>
 </p:sld>
@@ -6576,49 +5907,19 @@
             </a:pPr>
             <a:r>
               <a:rPr/>
-              <a:t>5 Read the pattern before significance</a:t>
-            </a:r>
-          </a:p>
-        </p:txBody>
-      </p:sp>
-      <p:pic>
-        <p:nvPicPr>
-          <p:cNvPr descr="Portrait cutouts of nine actors who played Clark Kent positioned by age at first appearance and height, with a fitted line showing a weak negative relationship" id="0" name="Picture 1"/>
-          <p:cNvPicPr>
-            <a:picLocks noGrp="1" noChangeAspect="1"/>
-          </p:cNvPicPr>
-          <p:nvPr/>
-        </p:nvPicPr>
-        <p:blipFill>
-          <a:blip r:embed="rId3"/>
-          <a:stretch>
-            <a:fillRect/>
-          </a:stretch>
-        </p:blipFill>
-        <p:spPr bwMode="auto">
-          <a:xfrm>
-            <a:off x="1092200" y="2806700"/>
-            <a:ext cx="4902200" cy="2743200"/>
-          </a:xfrm>
-          <a:prstGeom prst="rect">
-            <a:avLst/>
-          </a:prstGeom>
-          <a:noFill/>
-          <a:ln w="9525">
-            <a:noFill/>
-            <a:headEnd/>
-            <a:tailEnd/>
-          </a:ln>
-        </p:spPr>
-      </p:pic>
-      <p:sp>
-        <p:nvSpPr>
-          <p:cNvPr id="4" name="Content Placeholder 3"/>
-          <p:cNvSpPr>
-            <a:spLocks noGrp="1"/>
-          </p:cNvSpPr>
-          <p:nvPr>
-            <p:ph idx="2" sz="half"/>
+              <a:t>4 Predict the RH1 relationship</a:t>
+            </a:r>
+          </a:p>
+        </p:txBody>
+      </p:sp>
+      <p:sp>
+        <p:nvSpPr>
+          <p:cNvPr id="3" name="Content Placeholder 2"/>
+          <p:cNvSpPr>
+            <a:spLocks noGrp="1"/>
+          </p:cNvSpPr>
+          <p:nvPr>
+            <p:ph idx="1"/>
           </p:nvPr>
         </p:nvSpPr>
         <p:spPr/>
@@ -6630,42 +5931,46 @@
               <a:buNone/>
             </a:pPr>
             <a:r>
+              <a:rPr/>
+              <a:t>[RH1 · Before the analysis]</a:t>
+            </a:r>
+          </a:p>
+          <a:p>
+            <a:pPr lvl="0" indent="0" marL="0">
+              <a:buNone/>
+            </a:pPr>
+            <a:r>
               <a:rPr b="1"/>
-              <a:t>Correlation:</a:t>
+              <a:t>Height difference</a:t>
             </a:r>
             <a:r>
               <a:rPr/>
-              <a:t> direction, form, outliers</a:t>
-            </a:r>
-          </a:p>
-          <a:p>
-            <a:pPr lvl="0" indent="0" marL="0">
-              <a:buNone/>
-            </a:pPr>
+              <a:t> and </a:t>
+            </a:r>
             <a:r>
               <a:rPr b="1"/>
-              <a:t>Chi-square:</a:t>
-            </a:r>
+              <a:t>Letterboxd likes in thousands</a:t>
+            </a:r>
+          </a:p>
+          <a:p>
+            <a:pPr lvl="0"/>
             <a:r>
               <a:rPr/>
-              <a:t> observed counts, expected counts, percentages</a:t>
-            </a:r>
-          </a:p>
-          <a:p>
-            <a:pPr lvl="0" indent="0" marL="0">
-              <a:buNone/>
-            </a:pPr>
+              <a:t>What direction does the worksheet predict?</a:t>
+            </a:r>
+          </a:p>
+          <a:p>
+            <a:pPr lvl="0"/>
             <a:r>
               <a:rPr/>
-              <a:t>Then read </a:t>
-            </a:r>
-            <a:r>
-              <a:rPr i="1"/>
-              <a:t>p</a:t>
-            </a:r>
+              <a:t>Does your scatterplot show that direction?</a:t>
+            </a:r>
+          </a:p>
+          <a:p>
+            <a:pPr lvl="0"/>
             <a:r>
               <a:rPr/>
-              <a:t>.</a:t>
+              <a:t>Is the pattern roughly linear?</a:t>
             </a:r>
           </a:p>
         </p:txBody>
@@ -6717,7 +6022,7 @@
             </a:pPr>
             <a:r>
               <a:rPr/>
-              <a:t>6 Prepare RH1 in syntax</a:t>
+              <a:t>5 Prepare RH1 in syntax</a:t>
             </a:r>
           </a:p>
         </p:txBody>
@@ -6750,7 +6055,8 @@
 EXECUTE.
 GRAPH
   /SCATTERPLOT(BIVAR)=ldb_likes_thou
-    WITH height_diff.</a:t>
+    WITH height_diff
+  /MISSING=LISTWISE.</a:t>
             </a:r>
           </a:p>
         </p:txBody>
@@ -6802,7 +6108,7 @@
             </a:pPr>
             <a:r>
               <a:rPr/>
-              <a:t>7 Run the RH1 correlation</a:t>
+              <a:t>6 Run the RH1 correlation</a:t>
             </a:r>
           </a:p>
         </p:txBody>
@@ -6835,7 +6141,7 @@
     ldb_likes_thou
   /PRINT=TWOTAIL
   /STATISTICS DESCRIPTIVES
-  /MISSING=LISTWISE.</a:t>
+  /MISSING=PAIRWISE.</a:t>
             </a:r>
           </a:p>
         </p:txBody>
@@ -6887,41 +6193,201 @@
             </a:pPr>
             <a:r>
               <a:rPr/>
-              <a:t>8 Locate the RH1 evidence</a:t>
-            </a:r>
-          </a:p>
-        </p:txBody>
-      </p:sp>
-      <p:pic>
-        <p:nvPicPr>
-          <p:cNvPr descr="SPSS-style correlation output for height difference and Letterboxd likes in thousands, showing r equals .935, p equals .020, and 5 complete pairs" id="0" name="Picture 1"/>
-          <p:cNvPicPr>
-            <a:picLocks noGrp="1" noChangeAspect="1"/>
-          </p:cNvPicPr>
-          <p:nvPr/>
-        </p:nvPicPr>
-        <p:blipFill>
-          <a:blip r:embed="rId3"/>
-          <a:stretch>
-            <a:fillRect/>
-          </a:stretch>
-        </p:blipFill>
-        <p:spPr bwMode="auto">
-          <a:xfrm>
-            <a:off x="3048000" y="2628900"/>
-            <a:ext cx="6083300" cy="3098800"/>
-          </a:xfrm>
-          <a:prstGeom prst="rect">
-            <a:avLst/>
-          </a:prstGeom>
-          <a:noFill/>
-          <a:ln w="9525">
-            <a:noFill/>
-            <a:headEnd/>
-            <a:tailEnd/>
-          </a:ln>
-        </p:spPr>
-      </p:pic>
+              <a:t>7 Read the RH1 output</a:t>
+            </a:r>
+          </a:p>
+        </p:txBody>
+      </p:sp>
+      <p:graphicFrame>
+        <p:nvGraphicFramePr>
+          <p:cNvPr id="6" name="Content Placeholder 5"/>
+          <p:cNvGraphicFramePr>
+            <a:graphicFrameLocks noGrp="1"/>
+          </p:cNvGraphicFramePr>
+          <p:nvPr>
+            <p:ph idx="1"/>
+          </p:nvPr>
+        </p:nvGraphicFramePr>
+        <p:xfrm>
+          <a:off x="1092200" y="2628900"/>
+          <a:ext cx="9994900" cy="3098800"/>
+        </p:xfrm>
+        <a:graphic>
+          <a:graphicData uri="http://schemas.openxmlformats.org/drawingml/2006/table">
+            <a:tbl>
+              <a:tblPr firstRow="1" bandRow="1">
+                <a:tableStyleId>{5C22544A-7EE6-4342-B048-85BDC9FD1C3A}</a:tableStyleId>
+              </a:tblPr>
+              <a:tblGrid>
+                <a:gridCol w="4991100"/>
+                <a:gridCol w="4991100"/>
+              </a:tblGrid>
+              <a:tr h="0">
+                <a:tc>
+                  <a:txBody>
+                    <a:bodyPr/>
+                    <a:lstStyle/>
+                    <a:p>
+                      <a:pPr lvl="0" indent="0" marL="0">
+                        <a:buNone/>
+                      </a:pPr>
+                      <a:r>
+                        <a:rPr/>
+                        <a:t>Find in SPSS</a:t>
+                      </a:r>
+                    </a:p>
+                  </a:txBody>
+                  <a:tcPr/>
+                </a:tc>
+                <a:tc>
+                  <a:txBody>
+                    <a:bodyPr/>
+                    <a:lstStyle/>
+                    <a:p>
+                      <a:pPr lvl="0" indent="0" marL="0">
+                        <a:buNone/>
+                      </a:pPr>
+                      <a:r>
+                        <a:rPr/>
+                        <a:t>Record in the worksheet</a:t>
+                      </a:r>
+                    </a:p>
+                  </a:txBody>
+                  <a:tcPr/>
+                </a:tc>
+              </a:tr>
+              <a:tr h="0">
+                <a:tc>
+                  <a:txBody>
+                    <a:bodyPr/>
+                    <a:lstStyle/>
+                    <a:p>
+                      <a:pPr lvl="0" indent="0" marL="0">
+                        <a:buNone/>
+                      </a:pPr>
+                      <a:r>
+                        <a:rPr/>
+                        <a:t>Descriptive Statistics</a:t>
+                      </a:r>
+                    </a:p>
+                  </a:txBody>
+                </a:tc>
+                <a:tc>
+                  <a:txBody>
+                    <a:bodyPr/>
+                    <a:lstStyle/>
+                    <a:p>
+                      <a:pPr lvl="0" indent="0" marL="0">
+                        <a:buNone/>
+                      </a:pPr>
+                      <a:r>
+                        <a:rPr/>
+                        <a:t>Mean, SD, and N for each variable</a:t>
+                      </a:r>
+                    </a:p>
+                  </a:txBody>
+                </a:tc>
+              </a:tr>
+              <a:tr h="0">
+                <a:tc>
+                  <a:txBody>
+                    <a:bodyPr/>
+                    <a:lstStyle/>
+                    <a:p>
+                      <a:pPr lvl="0" indent="0" marL="0">
+                        <a:buNone/>
+                      </a:pPr>
+                      <a:r>
+                        <a:rPr/>
+                        <a:t>Pearson Correlation</a:t>
+                      </a:r>
+                    </a:p>
+                  </a:txBody>
+                </a:tc>
+                <a:tc>
+                  <a:txBody>
+                    <a:bodyPr/>
+                    <a:lstStyle/>
+                    <a:p>
+                      <a:pPr lvl="0" indent="0" marL="0">
+                        <a:buNone/>
+                      </a:pPr>
+                      <a:r>
+                        <a:rPr i="1"/>
+                        <a:t>r</a:t>
+                      </a:r>
+                    </a:p>
+                  </a:txBody>
+                </a:tc>
+              </a:tr>
+              <a:tr h="0">
+                <a:tc>
+                  <a:txBody>
+                    <a:bodyPr/>
+                    <a:lstStyle/>
+                    <a:p>
+                      <a:pPr lvl="0" indent="0" marL="0">
+                        <a:buNone/>
+                      </a:pPr>
+                      <a:r>
+                        <a:rPr/>
+                        <a:t>Sig. (2-tailed)</a:t>
+                      </a:r>
+                    </a:p>
+                  </a:txBody>
+                </a:tc>
+                <a:tc>
+                  <a:txBody>
+                    <a:bodyPr/>
+                    <a:lstStyle/>
+                    <a:p>
+                      <a:pPr lvl="0" indent="0" marL="0">
+                        <a:buNone/>
+                      </a:pPr>
+                      <a:r>
+                        <a:rPr i="1"/>
+                        <a:t>p</a:t>
+                      </a:r>
+                    </a:p>
+                  </a:txBody>
+                </a:tc>
+              </a:tr>
+              <a:tr h="0">
+                <a:tc>
+                  <a:txBody>
+                    <a:bodyPr/>
+                    <a:lstStyle/>
+                    <a:p>
+                      <a:pPr lvl="0" indent="0" marL="0">
+                        <a:buNone/>
+                      </a:pPr>
+                      <a:r>
+                        <a:rPr/>
+                        <a:t>N in the correlation table</a:t>
+                      </a:r>
+                    </a:p>
+                  </a:txBody>
+                </a:tc>
+                <a:tc>
+                  <a:txBody>
+                    <a:bodyPr/>
+                    <a:lstStyle/>
+                    <a:p>
+                      <a:pPr lvl="0" indent="0" marL="0">
+                        <a:buNone/>
+                      </a:pPr>
+                      <a:r>
+                        <a:rPr/>
+                        <a:t>Number of complete pairs</a:t>
+                      </a:r>
+                    </a:p>
+                  </a:txBody>
+                </a:tc>
+              </a:tr>
+            </a:tbl>
+          </a:graphicData>
+        </a:graphic>
+      </p:graphicFrame>
     </p:spTree>
   </p:cSld>
 </p:sld>
